--- a/classes/parte-0-prerrequisitos/014-numpy-tipos-creacion-atributos/clase-014-numpy-tipos-creacion-atributos-presentacion.pptx
+++ b/classes/parte-0-prerrequisitos/014-numpy-tipos-creacion-atributos/clase-014-numpy-tipos-creacion-atributos-presentacion.pptx
@@ -3272,7 +3272,7 @@
                 </a:solidFill>
                 <a:latin typeface="Segoe UI"/>
               </a:rPr>
-              <a:t>Parte: 0 — Prerrequisitos · Fuente: VanderPlas, Python Data Science Handbook, cap. 2 — Introduction to NumPy, §§ 2.1–2.2. · Duración estimada: 75 min.</a:t>
+              <a:t>Parte: 0 — Prerrequisitos · Fuente: VanderPlas, Python Data Science Handbook, cap. 2 — Introduction to NumPy, §§ 2.1–2.2. · Duración estimada: 75 min. · Nivel: Básico</a:t>
             </a:r>
           </a:p>
         </p:txBody>
@@ -3581,7 +3581,7 @@
                 </a:solidFill>
                 <a:latin typeface="Segoe UI"/>
               </a:rPr>
-              <a:t>Parte: 0 — Prerrequisitos · Fuente: VanderPlas, Python Data Science Handbook, cap. 2 — Introduction to NumPy, §§ 2.1–2.2. · Duración estimada: 75 min.</a:t>
+              <a:t>Parte: 0 — Prerrequisitos · Fuente: VanderPlas, Python Data Science Handbook, cap. 2 — Introduction to NumPy, §§ 2.1–2.2. · Duración estimada: 75 min. · Nivel: Básico</a:t>
             </a:r>
           </a:p>
         </p:txBody>
